--- a/Modern-Physics/lecture/05_Quantum_Mechanics/l5.pptx
+++ b/Modern-Physics/lecture/05_Quantum_Mechanics/l5.pptx
@@ -5,10 +5,14 @@
     <p:sldMasterId id="2147483648" r:id="rId1"/>
   </p:sldMasterIdLst>
   <p:notesMasterIdLst>
-    <p:notesMasterId r:id="rId3"/>
+    <p:notesMasterId r:id="rId7"/>
   </p:notesMasterIdLst>
   <p:sldIdLst>
     <p:sldId id="256" r:id="rId2"/>
+    <p:sldId id="257" r:id="rId3"/>
+    <p:sldId id="258" r:id="rId4"/>
+    <p:sldId id="259" r:id="rId5"/>
+    <p:sldId id="260" r:id="rId6"/>
   </p:sldIdLst>
   <p:sldSz cx="12192000" cy="6858000"/>
   <p:notesSz cx="6858000" cy="9144000"/>
@@ -197,7 +201,7 @@
           <a:p>
             <a:fld id="{9A0A92F6-DB74-441C-AE03-347A3A27B69C}" type="datetimeFigureOut">
               <a:rPr lang="zh-TW" altLang="en-US" smtClean="0"/>
-              <a:t>2026/4/30</a:t>
+              <a:t>2026/5/8</a:t>
             </a:fld>
             <a:endParaRPr lang="zh-TW" altLang="en-US"/>
           </a:p>
@@ -464,6 +468,90 @@
 </p:notesMaster>
 </file>
 
+<file path=ppt/notesSlides/notesSlide1.xml><?xml version="1.0" encoding="utf-8"?>
+<p:notes xmlns:a="http://schemas.openxmlformats.org/drawingml/2006/main" xmlns:r="http://schemas.openxmlformats.org/officeDocument/2006/relationships" xmlns:p="http://schemas.openxmlformats.org/presentationml/2006/main">
+  <p:cSld>
+    <p:spTree>
+      <p:nvGrpSpPr>
+        <p:cNvPr id="1" name=""/>
+        <p:cNvGrpSpPr/>
+        <p:nvPr/>
+      </p:nvGrpSpPr>
+      <p:grpSpPr>
+        <a:xfrm>
+          <a:off x="0" y="0"/>
+          <a:ext cx="0" cy="0"/>
+          <a:chOff x="0" y="0"/>
+          <a:chExt cx="0" cy="0"/>
+        </a:xfrm>
+      </p:grpSpPr>
+      <p:sp>
+        <p:nvSpPr>
+          <p:cNvPr id="2" name="投影片影像版面配置區 1"/>
+          <p:cNvSpPr>
+            <a:spLocks noGrp="1" noRot="1" noChangeAspect="1"/>
+          </p:cNvSpPr>
+          <p:nvPr>
+            <p:ph type="sldImg"/>
+          </p:nvPr>
+        </p:nvSpPr>
+        <p:spPr/>
+      </p:sp>
+      <p:sp>
+        <p:nvSpPr>
+          <p:cNvPr id="3" name="備忘稿版面配置區 2"/>
+          <p:cNvSpPr>
+            <a:spLocks noGrp="1"/>
+          </p:cNvSpPr>
+          <p:nvPr>
+            <p:ph type="body" idx="1"/>
+          </p:nvPr>
+        </p:nvSpPr>
+        <p:spPr/>
+        <p:txBody>
+          <a:bodyPr/>
+          <a:lstStyle/>
+          <a:p>
+            <a:endParaRPr lang="zh-TW" altLang="en-US"/>
+          </a:p>
+        </p:txBody>
+      </p:sp>
+      <p:sp>
+        <p:nvSpPr>
+          <p:cNvPr id="4" name="投影片編號版面配置區 3"/>
+          <p:cNvSpPr>
+            <a:spLocks noGrp="1"/>
+          </p:cNvSpPr>
+          <p:nvPr>
+            <p:ph type="sldNum" sz="quarter" idx="5"/>
+          </p:nvPr>
+        </p:nvSpPr>
+        <p:spPr/>
+        <p:txBody>
+          <a:bodyPr/>
+          <a:lstStyle/>
+          <a:p>
+            <a:fld id="{24EB3570-367B-4E20-A1EB-13BC1EC7DEA0}" type="slidenum">
+              <a:rPr lang="zh-TW" altLang="en-US" smtClean="0"/>
+              <a:t>4</a:t>
+            </a:fld>
+            <a:endParaRPr lang="zh-TW" altLang="en-US"/>
+          </a:p>
+        </p:txBody>
+      </p:sp>
+    </p:spTree>
+    <p:extLst>
+      <p:ext uri="{BB962C8B-B14F-4D97-AF65-F5344CB8AC3E}">
+        <p14:creationId xmlns:p14="http://schemas.microsoft.com/office/powerpoint/2010/main" val="828510776"/>
+      </p:ext>
+    </p:extLst>
+  </p:cSld>
+  <p:clrMapOvr>
+    <a:masterClrMapping/>
+  </p:clrMapOvr>
+</p:notes>
+</file>
+
 <file path=ppt/slideLayouts/slideLayout1.xml><?xml version="1.0" encoding="utf-8"?>
 <p:sldLayout xmlns:a="http://schemas.openxmlformats.org/drawingml/2006/main" xmlns:r="http://schemas.openxmlformats.org/officeDocument/2006/relationships" xmlns:p="http://schemas.openxmlformats.org/presentationml/2006/main" type="title" preserve="1">
   <p:cSld name="標題投影片">
@@ -611,7 +699,7 @@
           <a:p>
             <a:fld id="{95AEDF69-78C5-4321-AD9F-E50A3E378F73}" type="datetimeFigureOut">
               <a:rPr lang="zh-TW" altLang="en-US" smtClean="0"/>
-              <a:t>2026/4/30</a:t>
+              <a:t>2026/5/8</a:t>
             </a:fld>
             <a:endParaRPr lang="zh-TW" altLang="en-US"/>
           </a:p>
@@ -809,7 +897,7 @@
           <a:p>
             <a:fld id="{95AEDF69-78C5-4321-AD9F-E50A3E378F73}" type="datetimeFigureOut">
               <a:rPr lang="zh-TW" altLang="en-US" smtClean="0"/>
-              <a:t>2026/4/30</a:t>
+              <a:t>2026/5/8</a:t>
             </a:fld>
             <a:endParaRPr lang="zh-TW" altLang="en-US"/>
           </a:p>
@@ -1017,7 +1105,7 @@
           <a:p>
             <a:fld id="{95AEDF69-78C5-4321-AD9F-E50A3E378F73}" type="datetimeFigureOut">
               <a:rPr lang="zh-TW" altLang="en-US" smtClean="0"/>
-              <a:t>2026/4/30</a:t>
+              <a:t>2026/5/8</a:t>
             </a:fld>
             <a:endParaRPr lang="zh-TW" altLang="en-US"/>
           </a:p>
@@ -1215,7 +1303,7 @@
           <a:p>
             <a:fld id="{95AEDF69-78C5-4321-AD9F-E50A3E378F73}" type="datetimeFigureOut">
               <a:rPr lang="zh-TW" altLang="en-US" smtClean="0"/>
-              <a:t>2026/4/30</a:t>
+              <a:t>2026/5/8</a:t>
             </a:fld>
             <a:endParaRPr lang="zh-TW" altLang="en-US"/>
           </a:p>
@@ -1490,7 +1578,7 @@
           <a:p>
             <a:fld id="{95AEDF69-78C5-4321-AD9F-E50A3E378F73}" type="datetimeFigureOut">
               <a:rPr lang="zh-TW" altLang="en-US" smtClean="0"/>
-              <a:t>2026/4/30</a:t>
+              <a:t>2026/5/8</a:t>
             </a:fld>
             <a:endParaRPr lang="zh-TW" altLang="en-US"/>
           </a:p>
@@ -1755,7 +1843,7 @@
           <a:p>
             <a:fld id="{95AEDF69-78C5-4321-AD9F-E50A3E378F73}" type="datetimeFigureOut">
               <a:rPr lang="zh-TW" altLang="en-US" smtClean="0"/>
-              <a:t>2026/4/30</a:t>
+              <a:t>2026/5/8</a:t>
             </a:fld>
             <a:endParaRPr lang="zh-TW" altLang="en-US"/>
           </a:p>
@@ -2167,7 +2255,7 @@
           <a:p>
             <a:fld id="{95AEDF69-78C5-4321-AD9F-E50A3E378F73}" type="datetimeFigureOut">
               <a:rPr lang="zh-TW" altLang="en-US" smtClean="0"/>
-              <a:t>2026/4/30</a:t>
+              <a:t>2026/5/8</a:t>
             </a:fld>
             <a:endParaRPr lang="zh-TW" altLang="en-US"/>
           </a:p>
@@ -2308,7 +2396,7 @@
           <a:p>
             <a:fld id="{95AEDF69-78C5-4321-AD9F-E50A3E378F73}" type="datetimeFigureOut">
               <a:rPr lang="zh-TW" altLang="en-US" smtClean="0"/>
-              <a:t>2026/4/30</a:t>
+              <a:t>2026/5/8</a:t>
             </a:fld>
             <a:endParaRPr lang="zh-TW" altLang="en-US"/>
           </a:p>
@@ -2421,7 +2509,7 @@
           <a:p>
             <a:fld id="{95AEDF69-78C5-4321-AD9F-E50A3E378F73}" type="datetimeFigureOut">
               <a:rPr lang="zh-TW" altLang="en-US" smtClean="0"/>
-              <a:t>2026/4/30</a:t>
+              <a:t>2026/5/8</a:t>
             </a:fld>
             <a:endParaRPr lang="zh-TW" altLang="en-US"/>
           </a:p>
@@ -2732,7 +2820,7 @@
           <a:p>
             <a:fld id="{95AEDF69-78C5-4321-AD9F-E50A3E378F73}" type="datetimeFigureOut">
               <a:rPr lang="zh-TW" altLang="en-US" smtClean="0"/>
-              <a:t>2026/4/30</a:t>
+              <a:t>2026/5/8</a:t>
             </a:fld>
             <a:endParaRPr lang="zh-TW" altLang="en-US"/>
           </a:p>
@@ -3020,7 +3108,7 @@
           <a:p>
             <a:fld id="{95AEDF69-78C5-4321-AD9F-E50A3E378F73}" type="datetimeFigureOut">
               <a:rPr lang="zh-TW" altLang="en-US" smtClean="0"/>
-              <a:t>2026/4/30</a:t>
+              <a:t>2026/5/8</a:t>
             </a:fld>
             <a:endParaRPr lang="zh-TW" altLang="en-US"/>
           </a:p>
@@ -3261,7 +3349,7 @@
           <a:p>
             <a:fld id="{95AEDF69-78C5-4321-AD9F-E50A3E378F73}" type="datetimeFigureOut">
               <a:rPr lang="zh-TW" altLang="en-US" smtClean="0"/>
-              <a:t>2026/4/30</a:t>
+              <a:t>2026/5/8</a:t>
             </a:fld>
             <a:endParaRPr lang="zh-TW" altLang="en-US"/>
           </a:p>
@@ -3738,13 +3826,1490 @@
   <p:clrMapOvr>
     <a:masterClrMapping/>
   </p:clrMapOvr>
-  <mc:AlternateContent xmlns:mc="http://schemas.openxmlformats.org/markup-compatibility/2006" xmlns:p14="http://schemas.microsoft.com/office/powerpoint/2010/main">
-    <mc:Choice Requires="p14">
+  <mc:AlternateContent xmlns:mc="http://schemas.openxmlformats.org/markup-compatibility/2006">
+    <mc:Choice xmlns:p14="http://schemas.microsoft.com/office/powerpoint/2010/main" Requires="p14">
       <p:transition spd="slow" p14:dur="2000">
         <p:cut/>
       </p:transition>
     </mc:Choice>
-    <mc:Fallback xmlns="">
+    <mc:Fallback>
+      <p:transition spd="slow">
+        <p:cut/>
+      </p:transition>
+    </mc:Fallback>
+  </mc:AlternateContent>
+</p:sld>
+</file>
+
+<file path=ppt/slides/slide2.xml><?xml version="1.0" encoding="utf-8"?>
+<p:sld xmlns:a="http://schemas.openxmlformats.org/drawingml/2006/main" xmlns:r="http://schemas.openxmlformats.org/officeDocument/2006/relationships" xmlns:p="http://schemas.openxmlformats.org/presentationml/2006/main">
+  <p:cSld>
+    <p:spTree>
+      <p:nvGrpSpPr>
+        <p:cNvPr id="1" name=""/>
+        <p:cNvGrpSpPr/>
+        <p:nvPr/>
+      </p:nvGrpSpPr>
+      <p:grpSpPr>
+        <a:xfrm>
+          <a:off x="0" y="0"/>
+          <a:ext cx="0" cy="0"/>
+          <a:chOff x="0" y="0"/>
+          <a:chExt cx="0" cy="0"/>
+        </a:xfrm>
+      </p:grpSpPr>
+      <p:pic>
+        <p:nvPicPr>
+          <p:cNvPr id="4" name="圖片 3" descr="File:Infinite potential well-en.svg">
+            <a:extLst>
+              <a:ext uri="{FF2B5EF4-FFF2-40B4-BE49-F238E27FC236}">
+                <a16:creationId xmlns:a16="http://schemas.microsoft.com/office/drawing/2014/main" id="{26ACB4F8-01F4-5A2F-09C0-9E5E2CD9AD34}"/>
+              </a:ext>
+            </a:extLst>
+          </p:cNvPr>
+          <p:cNvPicPr>
+            <a:picLocks noChangeAspect="1"/>
+          </p:cNvPicPr>
+          <p:nvPr/>
+        </p:nvPicPr>
+        <p:blipFill>
+          <a:blip r:embed="rId2"/>
+          <a:stretch>
+            <a:fillRect/>
+          </a:stretch>
+        </p:blipFill>
+        <p:spPr>
+          <a:xfrm>
+            <a:off x="2774806" y="1172585"/>
+            <a:ext cx="6642388" cy="5213268"/>
+          </a:xfrm>
+          <a:prstGeom prst="rect">
+            <a:avLst/>
+          </a:prstGeom>
+        </p:spPr>
+      </p:pic>
+      <p:pic>
+        <p:nvPicPr>
+          <p:cNvPr id="6" name="圖片 5">
+            <a:extLst>
+              <a:ext uri="{FF2B5EF4-FFF2-40B4-BE49-F238E27FC236}">
+                <a16:creationId xmlns:a16="http://schemas.microsoft.com/office/drawing/2014/main" id="{CCD38E08-E9FD-05BD-6A6C-365AA08A50F2}"/>
+              </a:ext>
+            </a:extLst>
+          </p:cNvPr>
+          <p:cNvPicPr>
+            <a:picLocks noChangeAspect="1"/>
+          </p:cNvPicPr>
+          <p:nvPr/>
+        </p:nvPicPr>
+        <p:blipFill>
+          <a:blip r:embed="rId3"/>
+          <a:stretch>
+            <a:fillRect/>
+          </a:stretch>
+        </p:blipFill>
+        <p:spPr>
+          <a:xfrm>
+            <a:off x="9174067" y="5993600"/>
+            <a:ext cx="1362265" cy="1114581"/>
+          </a:xfrm>
+          <a:prstGeom prst="rect">
+            <a:avLst/>
+          </a:prstGeom>
+        </p:spPr>
+      </p:pic>
+      <mc:AlternateContent xmlns:mc="http://schemas.openxmlformats.org/markup-compatibility/2006">
+        <mc:Choice xmlns:a14="http://schemas.microsoft.com/office/drawing/2010/main" Requires="a14">
+          <p:sp>
+            <p:nvSpPr>
+              <p:cNvPr id="2" name="標題 1">
+                <a:extLst>
+                  <a:ext uri="{FF2B5EF4-FFF2-40B4-BE49-F238E27FC236}">
+                    <a16:creationId xmlns:a16="http://schemas.microsoft.com/office/drawing/2014/main" id="{4B314400-0571-003C-F23A-A9D341A6D727}"/>
+                  </a:ext>
+                </a:extLst>
+              </p:cNvPr>
+              <p:cNvSpPr>
+                <a:spLocks noGrp="1"/>
+              </p:cNvSpPr>
+              <p:nvPr>
+                <p:ph type="title"/>
+              </p:nvPr>
+            </p:nvSpPr>
+            <p:spPr>
+              <a:xfrm>
+                <a:off x="7714149" y="5532437"/>
+                <a:ext cx="3588590" cy="1325563"/>
+              </a:xfrm>
+            </p:spPr>
+            <p:txBody>
+              <a:bodyPr/>
+              <a:lstStyle/>
+              <a:p>
+                <a14:m>
+                  <m:oMathPara xmlns:m="http://schemas.openxmlformats.org/officeDocument/2006/math">
+                    <m:oMathParaPr>
+                      <m:jc m:val="centerGroup"/>
+                    </m:oMathParaPr>
+                    <m:oMath xmlns:m="http://schemas.openxmlformats.org/officeDocument/2006/math">
+                      <m:r>
+                        <a:rPr lang="en-US" altLang="zh-TW" i="1" smtClean="0">
+                          <a:latin typeface="Cambria Math" panose="02040503050406030204" pitchFamily="18" charset="0"/>
+                        </a:rPr>
+                        <m:t>𝑥</m:t>
+                      </m:r>
+                    </m:oMath>
+                  </m:oMathPara>
+                </a14:m>
+                <a:endParaRPr lang="zh-TW" altLang="en-US"/>
+              </a:p>
+            </p:txBody>
+          </p:sp>
+        </mc:Choice>
+        <mc:Fallback>
+          <p:sp>
+            <p:nvSpPr>
+              <p:cNvPr id="2" name="標題 1">
+                <a:extLst>
+                  <a:ext uri="{FF2B5EF4-FFF2-40B4-BE49-F238E27FC236}">
+                    <a16:creationId xmlns:a16="http://schemas.microsoft.com/office/drawing/2014/main" id="{4B314400-0571-003C-F23A-A9D341A6D727}"/>
+                  </a:ext>
+                </a:extLst>
+              </p:cNvPr>
+              <p:cNvSpPr>
+                <a:spLocks noGrp="1" noRot="1" noChangeAspect="1" noMove="1" noResize="1" noEditPoints="1" noAdjustHandles="1" noChangeArrowheads="1" noChangeShapeType="1" noTextEdit="1"/>
+              </p:cNvSpPr>
+              <p:nvPr>
+                <p:ph type="title"/>
+              </p:nvPr>
+            </p:nvSpPr>
+            <p:spPr>
+              <a:xfrm>
+                <a:off x="7714149" y="5532437"/>
+                <a:ext cx="3588590" cy="1325563"/>
+              </a:xfrm>
+              <a:blipFill>
+                <a:blip r:embed="rId4"/>
+                <a:stretch>
+                  <a:fillRect/>
+                </a:stretch>
+              </a:blipFill>
+            </p:spPr>
+            <p:txBody>
+              <a:bodyPr/>
+              <a:lstStyle/>
+              <a:p>
+                <a:r>
+                  <a:rPr lang="zh-TW" altLang="en-US">
+                    <a:noFill/>
+                  </a:rPr>
+                  <a:t> </a:t>
+                </a:r>
+              </a:p>
+            </p:txBody>
+          </p:sp>
+        </mc:Fallback>
+      </mc:AlternateContent>
+    </p:spTree>
+    <p:extLst>
+      <p:ext uri="{BB962C8B-B14F-4D97-AF65-F5344CB8AC3E}">
+        <p14:creationId xmlns:p14="http://schemas.microsoft.com/office/powerpoint/2010/main" val="2500109445"/>
+      </p:ext>
+    </p:extLst>
+  </p:cSld>
+  <p:clrMapOvr>
+    <a:masterClrMapping/>
+  </p:clrMapOvr>
+  <mc:AlternateContent xmlns:mc="http://schemas.openxmlformats.org/markup-compatibility/2006">
+    <mc:Choice xmlns:p14="http://schemas.microsoft.com/office/powerpoint/2010/main" Requires="p14">
+      <p:transition spd="slow" p14:dur="2000">
+        <p:cut/>
+      </p:transition>
+    </mc:Choice>
+    <mc:Fallback>
+      <p:transition spd="slow">
+        <p:cut/>
+      </p:transition>
+    </mc:Fallback>
+  </mc:AlternateContent>
+</p:sld>
+</file>
+
+<file path=ppt/slides/slide3.xml><?xml version="1.0" encoding="utf-8"?>
+<p:sld xmlns:a="http://schemas.openxmlformats.org/drawingml/2006/main" xmlns:r="http://schemas.openxmlformats.org/officeDocument/2006/relationships" xmlns:p="http://schemas.openxmlformats.org/presentationml/2006/main">
+  <p:cSld>
+    <p:spTree>
+      <p:nvGrpSpPr>
+        <p:cNvPr id="1" name=""/>
+        <p:cNvGrpSpPr/>
+        <p:nvPr/>
+      </p:nvGrpSpPr>
+      <p:grpSpPr>
+        <a:xfrm>
+          <a:off x="0" y="0"/>
+          <a:ext cx="0" cy="0"/>
+          <a:chOff x="0" y="0"/>
+          <a:chExt cx="0" cy="0"/>
+        </a:xfrm>
+      </p:grpSpPr>
+      <p:pic>
+        <p:nvPicPr>
+          <p:cNvPr id="5" name="圖片 4">
+            <a:extLst>
+              <a:ext uri="{FF2B5EF4-FFF2-40B4-BE49-F238E27FC236}">
+                <a16:creationId xmlns:a16="http://schemas.microsoft.com/office/drawing/2014/main" id="{41D09A05-2594-D07F-A2B9-F639BD61538F}"/>
+              </a:ext>
+            </a:extLst>
+          </p:cNvPr>
+          <p:cNvPicPr>
+            <a:picLocks noChangeAspect="1"/>
+          </p:cNvPicPr>
+          <p:nvPr/>
+        </p:nvPicPr>
+        <p:blipFill>
+          <a:blip r:embed="rId2"/>
+          <a:stretch>
+            <a:fillRect/>
+          </a:stretch>
+        </p:blipFill>
+        <p:spPr>
+          <a:xfrm>
+            <a:off x="0" y="0"/>
+            <a:ext cx="10768984" cy="6858000"/>
+          </a:xfrm>
+          <a:prstGeom prst="rect">
+            <a:avLst/>
+          </a:prstGeom>
+        </p:spPr>
+      </p:pic>
+    </p:spTree>
+    <p:extLst>
+      <p:ext uri="{BB962C8B-B14F-4D97-AF65-F5344CB8AC3E}">
+        <p14:creationId xmlns:p14="http://schemas.microsoft.com/office/powerpoint/2010/main" val="2919922002"/>
+      </p:ext>
+    </p:extLst>
+  </p:cSld>
+  <p:clrMapOvr>
+    <a:masterClrMapping/>
+  </p:clrMapOvr>
+  <mc:AlternateContent xmlns:mc="http://schemas.openxmlformats.org/markup-compatibility/2006">
+    <mc:Choice xmlns:p14="http://schemas.microsoft.com/office/powerpoint/2010/main" Requires="p14">
+      <p:transition spd="slow" p14:dur="2000">
+        <p:cut/>
+      </p:transition>
+    </mc:Choice>
+    <mc:Fallback>
+      <p:transition spd="slow">
+        <p:cut/>
+      </p:transition>
+    </mc:Fallback>
+  </mc:AlternateContent>
+</p:sld>
+</file>
+
+<file path=ppt/slides/slide4.xml><?xml version="1.0" encoding="utf-8"?>
+<p:sld xmlns:a="http://schemas.openxmlformats.org/drawingml/2006/main" xmlns:r="http://schemas.openxmlformats.org/officeDocument/2006/relationships" xmlns:p="http://schemas.openxmlformats.org/presentationml/2006/main">
+  <p:cSld>
+    <p:spTree>
+      <p:nvGrpSpPr>
+        <p:cNvPr id="1" name=""/>
+        <p:cNvGrpSpPr/>
+        <p:nvPr/>
+      </p:nvGrpSpPr>
+      <p:grpSpPr>
+        <a:xfrm>
+          <a:off x="0" y="0"/>
+          <a:ext cx="0" cy="0"/>
+          <a:chOff x="0" y="0"/>
+          <a:chExt cx="0" cy="0"/>
+        </a:xfrm>
+      </p:grpSpPr>
+      <p:pic>
+        <p:nvPicPr>
+          <p:cNvPr id="5" name="圖片 4">
+            <a:extLst>
+              <a:ext uri="{FF2B5EF4-FFF2-40B4-BE49-F238E27FC236}">
+                <a16:creationId xmlns:a16="http://schemas.microsoft.com/office/drawing/2014/main" id="{9A9AD66F-55CD-7ED1-7DA0-643D1D163D15}"/>
+              </a:ext>
+            </a:extLst>
+          </p:cNvPr>
+          <p:cNvPicPr>
+            <a:picLocks noChangeAspect="1"/>
+          </p:cNvPicPr>
+          <p:nvPr/>
+        </p:nvPicPr>
+        <p:blipFill>
+          <a:blip r:embed="rId3"/>
+          <a:stretch>
+            <a:fillRect/>
+          </a:stretch>
+        </p:blipFill>
+        <p:spPr>
+          <a:xfrm>
+            <a:off x="0" y="567555"/>
+            <a:ext cx="12192000" cy="4922982"/>
+          </a:xfrm>
+          <a:prstGeom prst="rect">
+            <a:avLst/>
+          </a:prstGeom>
+        </p:spPr>
+      </p:pic>
+      <p:pic>
+        <p:nvPicPr>
+          <p:cNvPr id="7" name="圖片 6">
+            <a:extLst>
+              <a:ext uri="{FF2B5EF4-FFF2-40B4-BE49-F238E27FC236}">
+                <a16:creationId xmlns:a16="http://schemas.microsoft.com/office/drawing/2014/main" id="{A7C79464-3118-5070-F1F9-BA7F328A5802}"/>
+              </a:ext>
+            </a:extLst>
+          </p:cNvPr>
+          <p:cNvPicPr>
+            <a:picLocks noChangeAspect="1"/>
+          </p:cNvPicPr>
+          <p:nvPr/>
+        </p:nvPicPr>
+        <p:blipFill>
+          <a:blip r:embed="rId4"/>
+          <a:stretch>
+            <a:fillRect/>
+          </a:stretch>
+        </p:blipFill>
+        <p:spPr>
+          <a:xfrm>
+            <a:off x="4426990" y="128853"/>
+            <a:ext cx="2838450" cy="552450"/>
+          </a:xfrm>
+          <a:prstGeom prst="rect">
+            <a:avLst/>
+          </a:prstGeom>
+        </p:spPr>
+      </p:pic>
+      <p:pic>
+        <p:nvPicPr>
+          <p:cNvPr id="9" name="圖片 8">
+            <a:extLst>
+              <a:ext uri="{FF2B5EF4-FFF2-40B4-BE49-F238E27FC236}">
+                <a16:creationId xmlns:a16="http://schemas.microsoft.com/office/drawing/2014/main" id="{CAA994B8-D937-0A06-1A4B-AEF18E6F9CBA}"/>
+              </a:ext>
+            </a:extLst>
+          </p:cNvPr>
+          <p:cNvPicPr>
+            <a:picLocks noChangeAspect="1"/>
+          </p:cNvPicPr>
+          <p:nvPr/>
+        </p:nvPicPr>
+        <p:blipFill>
+          <a:blip r:embed="rId5"/>
+          <a:stretch>
+            <a:fillRect/>
+          </a:stretch>
+        </p:blipFill>
+        <p:spPr>
+          <a:xfrm>
+            <a:off x="3754178" y="4654482"/>
+            <a:ext cx="4184074" cy="504969"/>
+          </a:xfrm>
+          <a:prstGeom prst="rect">
+            <a:avLst/>
+          </a:prstGeom>
+        </p:spPr>
+      </p:pic>
+      <p:pic>
+        <p:nvPicPr>
+          <p:cNvPr id="11" name="圖片 10">
+            <a:extLst>
+              <a:ext uri="{FF2B5EF4-FFF2-40B4-BE49-F238E27FC236}">
+                <a16:creationId xmlns:a16="http://schemas.microsoft.com/office/drawing/2014/main" id="{E799E262-EBD2-1565-85B6-48E39663E69C}"/>
+              </a:ext>
+            </a:extLst>
+          </p:cNvPr>
+          <p:cNvPicPr>
+            <a:picLocks noChangeAspect="1"/>
+          </p:cNvPicPr>
+          <p:nvPr/>
+        </p:nvPicPr>
+        <p:blipFill>
+          <a:blip r:embed="rId6"/>
+          <a:stretch>
+            <a:fillRect/>
+          </a:stretch>
+        </p:blipFill>
+        <p:spPr>
+          <a:xfrm>
+            <a:off x="3850118" y="2509550"/>
+            <a:ext cx="4017531" cy="1575277"/>
+          </a:xfrm>
+          <a:prstGeom prst="rect">
+            <a:avLst/>
+          </a:prstGeom>
+        </p:spPr>
+      </p:pic>
+      <p:pic>
+        <p:nvPicPr>
+          <p:cNvPr id="13" name="圖片 12">
+            <a:extLst>
+              <a:ext uri="{FF2B5EF4-FFF2-40B4-BE49-F238E27FC236}">
+                <a16:creationId xmlns:a16="http://schemas.microsoft.com/office/drawing/2014/main" id="{12FDD40A-4D88-E2F5-B68D-6F558B1B3BB1}"/>
+              </a:ext>
+            </a:extLst>
+          </p:cNvPr>
+          <p:cNvPicPr>
+            <a:picLocks noChangeAspect="1"/>
+          </p:cNvPicPr>
+          <p:nvPr/>
+        </p:nvPicPr>
+        <p:blipFill>
+          <a:blip r:embed="rId7"/>
+          <a:stretch>
+            <a:fillRect/>
+          </a:stretch>
+        </p:blipFill>
+        <p:spPr>
+          <a:xfrm>
+            <a:off x="3775934" y="4019909"/>
+            <a:ext cx="4178455" cy="504969"/>
+          </a:xfrm>
+          <a:prstGeom prst="rect">
+            <a:avLst/>
+          </a:prstGeom>
+        </p:spPr>
+      </p:pic>
+      <p:pic>
+        <p:nvPicPr>
+          <p:cNvPr id="15" name="圖片 14">
+            <a:extLst>
+              <a:ext uri="{FF2B5EF4-FFF2-40B4-BE49-F238E27FC236}">
+                <a16:creationId xmlns:a16="http://schemas.microsoft.com/office/drawing/2014/main" id="{CCCA36EE-518B-DA8A-2C72-812186CDB8A5}"/>
+              </a:ext>
+            </a:extLst>
+          </p:cNvPr>
+          <p:cNvPicPr>
+            <a:picLocks noChangeAspect="1"/>
+          </p:cNvPicPr>
+          <p:nvPr/>
+        </p:nvPicPr>
+        <p:blipFill>
+          <a:blip r:embed="rId8"/>
+          <a:stretch>
+            <a:fillRect/>
+          </a:stretch>
+        </p:blipFill>
+        <p:spPr>
+          <a:xfrm>
+            <a:off x="2250271" y="423003"/>
+            <a:ext cx="1343212" cy="457264"/>
+          </a:xfrm>
+          <a:prstGeom prst="rect">
+            <a:avLst/>
+          </a:prstGeom>
+        </p:spPr>
+      </p:pic>
+      <p:pic>
+        <p:nvPicPr>
+          <p:cNvPr id="17" name="圖片 16">
+            <a:extLst>
+              <a:ext uri="{FF2B5EF4-FFF2-40B4-BE49-F238E27FC236}">
+                <a16:creationId xmlns:a16="http://schemas.microsoft.com/office/drawing/2014/main" id="{14338A42-8078-7594-BD99-F0D41C4A5497}"/>
+              </a:ext>
+            </a:extLst>
+          </p:cNvPr>
+          <p:cNvPicPr>
+            <a:picLocks noChangeAspect="1"/>
+          </p:cNvPicPr>
+          <p:nvPr/>
+        </p:nvPicPr>
+        <p:blipFill>
+          <a:blip r:embed="rId9"/>
+          <a:stretch>
+            <a:fillRect/>
+          </a:stretch>
+        </p:blipFill>
+        <p:spPr>
+          <a:xfrm>
+            <a:off x="8132379" y="1787251"/>
+            <a:ext cx="2590800" cy="466725"/>
+          </a:xfrm>
+          <a:prstGeom prst="rect">
+            <a:avLst/>
+          </a:prstGeom>
+        </p:spPr>
+      </p:pic>
+      <p:pic>
+        <p:nvPicPr>
+          <p:cNvPr id="19" name="圖片 18">
+            <a:extLst>
+              <a:ext uri="{FF2B5EF4-FFF2-40B4-BE49-F238E27FC236}">
+                <a16:creationId xmlns:a16="http://schemas.microsoft.com/office/drawing/2014/main" id="{77AA5FBB-32A0-E795-94A7-66028140CAE1}"/>
+              </a:ext>
+            </a:extLst>
+          </p:cNvPr>
+          <p:cNvPicPr>
+            <a:picLocks noChangeAspect="1"/>
+          </p:cNvPicPr>
+          <p:nvPr/>
+        </p:nvPicPr>
+        <p:blipFill>
+          <a:blip r:embed="rId10"/>
+          <a:stretch>
+            <a:fillRect/>
+          </a:stretch>
+        </p:blipFill>
+        <p:spPr>
+          <a:xfrm>
+            <a:off x="8132379" y="4077204"/>
+            <a:ext cx="2552700" cy="447675"/>
+          </a:xfrm>
+          <a:prstGeom prst="rect">
+            <a:avLst/>
+          </a:prstGeom>
+        </p:spPr>
+      </p:pic>
+      <p:pic>
+        <p:nvPicPr>
+          <p:cNvPr id="21" name="圖片 20">
+            <a:extLst>
+              <a:ext uri="{FF2B5EF4-FFF2-40B4-BE49-F238E27FC236}">
+                <a16:creationId xmlns:a16="http://schemas.microsoft.com/office/drawing/2014/main" id="{2591C84B-0BC9-00EB-8293-AAF6C971E2D9}"/>
+              </a:ext>
+            </a:extLst>
+          </p:cNvPr>
+          <p:cNvPicPr>
+            <a:picLocks noChangeAspect="1"/>
+          </p:cNvPicPr>
+          <p:nvPr/>
+        </p:nvPicPr>
+        <p:blipFill>
+          <a:blip r:embed="rId11"/>
+          <a:stretch>
+            <a:fillRect/>
+          </a:stretch>
+        </p:blipFill>
+        <p:spPr>
+          <a:xfrm>
+            <a:off x="8079829" y="4699386"/>
+            <a:ext cx="1666875" cy="457200"/>
+          </a:xfrm>
+          <a:prstGeom prst="rect">
+            <a:avLst/>
+          </a:prstGeom>
+        </p:spPr>
+      </p:pic>
+      <mc:AlternateContent xmlns:mc="http://schemas.openxmlformats.org/markup-compatibility/2006">
+        <mc:Choice xmlns:a14="http://schemas.microsoft.com/office/drawing/2010/main" Requires="a14">
+          <p:sp>
+            <p:nvSpPr>
+              <p:cNvPr id="24" name="標題 1">
+                <a:extLst>
+                  <a:ext uri="{FF2B5EF4-FFF2-40B4-BE49-F238E27FC236}">
+                    <a16:creationId xmlns:a16="http://schemas.microsoft.com/office/drawing/2014/main" id="{4F243DB3-9EBA-4674-D907-2F481E69DA4D}"/>
+                  </a:ext>
+                </a:extLst>
+              </p:cNvPr>
+              <p:cNvSpPr>
+                <a:spLocks noGrp="1"/>
+              </p:cNvSpPr>
+              <p:nvPr>
+                <p:ph type="title"/>
+              </p:nvPr>
+            </p:nvSpPr>
+            <p:spPr>
+              <a:xfrm>
+                <a:off x="1254603" y="1024819"/>
+                <a:ext cx="2338880" cy="638054"/>
+              </a:xfrm>
+            </p:spPr>
+            <p:txBody>
+              <a:bodyPr>
+                <a:normAutofit fontScale="90000"/>
+              </a:bodyPr>
+              <a:lstStyle/>
+              <a:p>
+                <a14:m>
+                  <m:oMathPara xmlns:m="http://schemas.openxmlformats.org/officeDocument/2006/math">
+                    <m:oMathParaPr>
+                      <m:jc m:val="centerGroup"/>
+                    </m:oMathParaPr>
+                    <m:oMath xmlns:m="http://schemas.openxmlformats.org/officeDocument/2006/math">
+                      <m:r>
+                        <m:rPr>
+                          <m:sty m:val="p"/>
+                        </m:rPr>
+                        <a:rPr lang="en-US" altLang="zh-TW" i="1" smtClean="0">
+                          <a:latin typeface="Cambria Math" panose="02040503050406030204" pitchFamily="18" charset="0"/>
+                        </a:rPr>
+                        <m:t>U</m:t>
+                      </m:r>
+                      <m:d>
+                        <m:dPr>
+                          <m:ctrlPr>
+                            <a:rPr lang="en-US" altLang="zh-TW" i="1" smtClean="0">
+                              <a:latin typeface="Cambria Math" panose="02040503050406030204" pitchFamily="18" charset="0"/>
+                            </a:rPr>
+                          </m:ctrlPr>
+                        </m:dPr>
+                        <m:e>
+                          <m:r>
+                            <a:rPr lang="en-US" altLang="zh-TW" b="0" i="1" smtClean="0">
+                              <a:latin typeface="Cambria Math" panose="02040503050406030204" pitchFamily="18" charset="0"/>
+                            </a:rPr>
+                            <m:t>𝑥</m:t>
+                          </m:r>
+                        </m:e>
+                      </m:d>
+                      <m:r>
+                        <a:rPr lang="en-US" altLang="zh-TW" b="0" i="1" smtClean="0">
+                          <a:latin typeface="Cambria Math" panose="02040503050406030204" pitchFamily="18" charset="0"/>
+                        </a:rPr>
+                        <m:t>=∞</m:t>
+                      </m:r>
+                    </m:oMath>
+                  </m:oMathPara>
+                </a14:m>
+                <a:endParaRPr lang="zh-TW" altLang="en-US"/>
+              </a:p>
+            </p:txBody>
+          </p:sp>
+        </mc:Choice>
+        <mc:Fallback>
+          <p:sp>
+            <p:nvSpPr>
+              <p:cNvPr id="24" name="標題 1">
+                <a:extLst>
+                  <a:ext uri="{FF2B5EF4-FFF2-40B4-BE49-F238E27FC236}">
+                    <a16:creationId xmlns:a16="http://schemas.microsoft.com/office/drawing/2014/main" id="{4F243DB3-9EBA-4674-D907-2F481E69DA4D}"/>
+                  </a:ext>
+                </a:extLst>
+              </p:cNvPr>
+              <p:cNvSpPr>
+                <a:spLocks noGrp="1" noRot="1" noChangeAspect="1" noMove="1" noResize="1" noEditPoints="1" noAdjustHandles="1" noChangeArrowheads="1" noChangeShapeType="1" noTextEdit="1"/>
+              </p:cNvSpPr>
+              <p:nvPr>
+                <p:ph type="title"/>
+              </p:nvPr>
+            </p:nvSpPr>
+            <p:spPr>
+              <a:xfrm>
+                <a:off x="1254603" y="1024819"/>
+                <a:ext cx="2338880" cy="638054"/>
+              </a:xfrm>
+              <a:blipFill>
+                <a:blip r:embed="rId12"/>
+                <a:stretch>
+                  <a:fillRect/>
+                </a:stretch>
+              </a:blipFill>
+            </p:spPr>
+            <p:txBody>
+              <a:bodyPr/>
+              <a:lstStyle/>
+              <a:p>
+                <a:r>
+                  <a:rPr lang="zh-TW" altLang="en-US">
+                    <a:noFill/>
+                  </a:rPr>
+                  <a:t> </a:t>
+                </a:r>
+              </a:p>
+            </p:txBody>
+          </p:sp>
+        </mc:Fallback>
+      </mc:AlternateContent>
+      <mc:AlternateContent xmlns:mc="http://schemas.openxmlformats.org/markup-compatibility/2006">
+        <mc:Choice xmlns:a14="http://schemas.microsoft.com/office/drawing/2010/main" Requires="a14">
+          <p:sp>
+            <p:nvSpPr>
+              <p:cNvPr id="25" name="標題 1">
+                <a:extLst>
+                  <a:ext uri="{FF2B5EF4-FFF2-40B4-BE49-F238E27FC236}">
+                    <a16:creationId xmlns:a16="http://schemas.microsoft.com/office/drawing/2014/main" id="{E93B9728-430A-F494-EAF0-50E37188A441}"/>
+                  </a:ext>
+                </a:extLst>
+              </p:cNvPr>
+              <p:cNvSpPr txBox="1">
+                <a:spLocks/>
+              </p:cNvSpPr>
+              <p:nvPr/>
+            </p:nvSpPr>
+            <p:spPr>
+              <a:xfrm>
+                <a:off x="8457214" y="917362"/>
+                <a:ext cx="2838450" cy="638054"/>
+              </a:xfrm>
+              <a:prstGeom prst="rect">
+                <a:avLst/>
+              </a:prstGeom>
+            </p:spPr>
+            <p:txBody>
+              <a:bodyPr vert="horz" lIns="91440" tIns="45720" rIns="91440" bIns="45720" rtlCol="0" anchor="ctr">
+                <a:normAutofit fontScale="82500" lnSpcReduction="10000"/>
+              </a:bodyPr>
+              <a:lstStyle>
+                <a:lvl1pPr algn="l" defTabSz="914400" rtl="0" eaLnBrk="1" latinLnBrk="0" hangingPunct="1">
+                  <a:lnSpc>
+                    <a:spcPct val="90000"/>
+                  </a:lnSpc>
+                  <a:spcBef>
+                    <a:spcPct val="0"/>
+                  </a:spcBef>
+                  <a:buNone/>
+                  <a:defRPr sz="4400" kern="1200">
+                    <a:solidFill>
+                      <a:schemeClr val="tx1"/>
+                    </a:solidFill>
+                    <a:latin typeface="+mj-lt"/>
+                    <a:ea typeface="+mj-ea"/>
+                    <a:cs typeface="+mj-cs"/>
+                  </a:defRPr>
+                </a:lvl1pPr>
+              </a:lstStyle>
+              <a:p>
+                <a14:m>
+                  <m:oMathPara xmlns:m="http://schemas.openxmlformats.org/officeDocument/2006/math">
+                    <m:oMathParaPr>
+                      <m:jc m:val="centerGroup"/>
+                    </m:oMathParaPr>
+                    <m:oMath xmlns:m="http://schemas.openxmlformats.org/officeDocument/2006/math">
+                      <m:r>
+                        <m:rPr>
+                          <m:sty m:val="p"/>
+                        </m:rPr>
+                        <a:rPr lang="en-US" altLang="zh-TW" i="1" smtClean="0">
+                          <a:latin typeface="Cambria Math" panose="02040503050406030204" pitchFamily="18" charset="0"/>
+                        </a:rPr>
+                        <m:t>U</m:t>
+                      </m:r>
+                      <m:d>
+                        <m:dPr>
+                          <m:ctrlPr>
+                            <a:rPr lang="en-US" altLang="zh-TW" i="1" smtClean="0">
+                              <a:latin typeface="Cambria Math" panose="02040503050406030204" pitchFamily="18" charset="0"/>
+                            </a:rPr>
+                          </m:ctrlPr>
+                        </m:dPr>
+                        <m:e>
+                          <m:r>
+                            <a:rPr lang="en-US" altLang="zh-TW" i="1" smtClean="0">
+                              <a:latin typeface="Cambria Math" panose="02040503050406030204" pitchFamily="18" charset="0"/>
+                            </a:rPr>
+                            <m:t>𝑥</m:t>
+                          </m:r>
+                        </m:e>
+                      </m:d>
+                      <m:r>
+                        <a:rPr lang="en-US" altLang="zh-TW" i="1" smtClean="0">
+                          <a:latin typeface="Cambria Math" panose="02040503050406030204" pitchFamily="18" charset="0"/>
+                        </a:rPr>
+                        <m:t>=∞</m:t>
+                      </m:r>
+                    </m:oMath>
+                  </m:oMathPara>
+                </a14:m>
+                <a:endParaRPr lang="zh-TW" altLang="en-US"/>
+              </a:p>
+            </p:txBody>
+          </p:sp>
+        </mc:Choice>
+        <mc:Fallback>
+          <p:sp>
+            <p:nvSpPr>
+              <p:cNvPr id="25" name="標題 1">
+                <a:extLst>
+                  <a:ext uri="{FF2B5EF4-FFF2-40B4-BE49-F238E27FC236}">
+                    <a16:creationId xmlns:a16="http://schemas.microsoft.com/office/drawing/2014/main" id="{E93B9728-430A-F494-EAF0-50E37188A441}"/>
+                  </a:ext>
+                </a:extLst>
+              </p:cNvPr>
+              <p:cNvSpPr txBox="1">
+                <a:spLocks noRot="1" noChangeAspect="1" noMove="1" noResize="1" noEditPoints="1" noAdjustHandles="1" noChangeArrowheads="1" noChangeShapeType="1" noTextEdit="1"/>
+              </p:cNvSpPr>
+              <p:nvPr/>
+            </p:nvSpPr>
+            <p:spPr>
+              <a:xfrm>
+                <a:off x="8457214" y="917362"/>
+                <a:ext cx="2838450" cy="638054"/>
+              </a:xfrm>
+              <a:prstGeom prst="rect">
+                <a:avLst/>
+              </a:prstGeom>
+              <a:blipFill>
+                <a:blip r:embed="rId13"/>
+                <a:stretch>
+                  <a:fillRect/>
+                </a:stretch>
+              </a:blipFill>
+            </p:spPr>
+            <p:txBody>
+              <a:bodyPr/>
+              <a:lstStyle/>
+              <a:p>
+                <a:r>
+                  <a:rPr lang="zh-TW" altLang="en-US">
+                    <a:noFill/>
+                  </a:rPr>
+                  <a:t> </a:t>
+                </a:r>
+              </a:p>
+            </p:txBody>
+          </p:sp>
+        </mc:Fallback>
+      </mc:AlternateContent>
+      <p:pic>
+        <p:nvPicPr>
+          <p:cNvPr id="27" name="圖片 26">
+            <a:extLst>
+              <a:ext uri="{FF2B5EF4-FFF2-40B4-BE49-F238E27FC236}">
+                <a16:creationId xmlns:a16="http://schemas.microsoft.com/office/drawing/2014/main" id="{544FF0EB-B094-3ADC-1E21-57C2A18F565D}"/>
+              </a:ext>
+            </a:extLst>
+          </p:cNvPr>
+          <p:cNvPicPr>
+            <a:picLocks noChangeAspect="1"/>
+          </p:cNvPicPr>
+          <p:nvPr/>
+        </p:nvPicPr>
+        <p:blipFill>
+          <a:blip r:embed="rId14"/>
+          <a:stretch>
+            <a:fillRect/>
+          </a:stretch>
+        </p:blipFill>
+        <p:spPr>
+          <a:xfrm>
+            <a:off x="5108027" y="5349255"/>
+            <a:ext cx="1476375" cy="628650"/>
+          </a:xfrm>
+          <a:prstGeom prst="rect">
+            <a:avLst/>
+          </a:prstGeom>
+        </p:spPr>
+      </p:pic>
+      <p:pic>
+        <p:nvPicPr>
+          <p:cNvPr id="29" name="圖片 28">
+            <a:extLst>
+              <a:ext uri="{FF2B5EF4-FFF2-40B4-BE49-F238E27FC236}">
+                <a16:creationId xmlns:a16="http://schemas.microsoft.com/office/drawing/2014/main" id="{B9CC549E-FCCB-C4E5-4040-C98D9830828A}"/>
+              </a:ext>
+            </a:extLst>
+          </p:cNvPr>
+          <p:cNvPicPr>
+            <a:picLocks noChangeAspect="1"/>
+          </p:cNvPicPr>
+          <p:nvPr/>
+        </p:nvPicPr>
+        <p:blipFill>
+          <a:blip r:embed="rId15"/>
+          <a:stretch>
+            <a:fillRect/>
+          </a:stretch>
+        </p:blipFill>
+        <p:spPr>
+          <a:xfrm>
+            <a:off x="3625014" y="5383414"/>
+            <a:ext cx="371475" cy="800100"/>
+          </a:xfrm>
+          <a:prstGeom prst="rect">
+            <a:avLst/>
+          </a:prstGeom>
+        </p:spPr>
+      </p:pic>
+      <p:pic>
+        <p:nvPicPr>
+          <p:cNvPr id="31" name="圖片 30">
+            <a:extLst>
+              <a:ext uri="{FF2B5EF4-FFF2-40B4-BE49-F238E27FC236}">
+                <a16:creationId xmlns:a16="http://schemas.microsoft.com/office/drawing/2014/main" id="{D377EF24-C629-0D24-68C6-B69F391EDFF6}"/>
+              </a:ext>
+            </a:extLst>
+          </p:cNvPr>
+          <p:cNvPicPr>
+            <a:picLocks noChangeAspect="1"/>
+          </p:cNvPicPr>
+          <p:nvPr/>
+        </p:nvPicPr>
+        <p:blipFill>
+          <a:blip r:embed="rId16"/>
+          <a:stretch>
+            <a:fillRect/>
+          </a:stretch>
+        </p:blipFill>
+        <p:spPr>
+          <a:xfrm>
+            <a:off x="7663876" y="5439742"/>
+            <a:ext cx="581025" cy="447675"/>
+          </a:xfrm>
+          <a:prstGeom prst="rect">
+            <a:avLst/>
+          </a:prstGeom>
+        </p:spPr>
+      </p:pic>
+      <p:pic>
+        <p:nvPicPr>
+          <p:cNvPr id="33" name="圖片 32">
+            <a:extLst>
+              <a:ext uri="{FF2B5EF4-FFF2-40B4-BE49-F238E27FC236}">
+                <a16:creationId xmlns:a16="http://schemas.microsoft.com/office/drawing/2014/main" id="{DE8B52E4-9784-7651-B9A2-9685DA6D7AF7}"/>
+              </a:ext>
+            </a:extLst>
+          </p:cNvPr>
+          <p:cNvPicPr>
+            <a:picLocks noChangeAspect="1"/>
+          </p:cNvPicPr>
+          <p:nvPr/>
+        </p:nvPicPr>
+        <p:blipFill>
+          <a:blip r:embed="rId17"/>
+          <a:stretch>
+            <a:fillRect/>
+          </a:stretch>
+        </p:blipFill>
+        <p:spPr>
+          <a:xfrm>
+            <a:off x="3850119" y="4572196"/>
+            <a:ext cx="1028700" cy="323850"/>
+          </a:xfrm>
+          <a:prstGeom prst="rect">
+            <a:avLst/>
+          </a:prstGeom>
+        </p:spPr>
+      </p:pic>
+      <p:pic>
+        <p:nvPicPr>
+          <p:cNvPr id="35" name="圖片 34">
+            <a:extLst>
+              <a:ext uri="{FF2B5EF4-FFF2-40B4-BE49-F238E27FC236}">
+                <a16:creationId xmlns:a16="http://schemas.microsoft.com/office/drawing/2014/main" id="{26DBE45A-9040-038E-C12C-99BE453A220F}"/>
+              </a:ext>
+            </a:extLst>
+          </p:cNvPr>
+          <p:cNvPicPr>
+            <a:picLocks noChangeAspect="1"/>
+          </p:cNvPicPr>
+          <p:nvPr/>
+        </p:nvPicPr>
+        <p:blipFill>
+          <a:blip r:embed="rId18"/>
+          <a:stretch>
+            <a:fillRect/>
+          </a:stretch>
+        </p:blipFill>
+        <p:spPr>
+          <a:xfrm>
+            <a:off x="3850119" y="3502486"/>
+            <a:ext cx="1001805" cy="319257"/>
+          </a:xfrm>
+          <a:prstGeom prst="rect">
+            <a:avLst/>
+          </a:prstGeom>
+        </p:spPr>
+      </p:pic>
+      <mc:AlternateContent xmlns:mc="http://schemas.openxmlformats.org/markup-compatibility/2006">
+        <mc:Choice xmlns:a14="http://schemas.microsoft.com/office/drawing/2010/main" Requires="a14">
+          <p:sp>
+            <p:nvSpPr>
+              <p:cNvPr id="36" name="標題 1">
+                <a:extLst>
+                  <a:ext uri="{FF2B5EF4-FFF2-40B4-BE49-F238E27FC236}">
+                    <a16:creationId xmlns:a16="http://schemas.microsoft.com/office/drawing/2014/main" id="{ECC31FCD-0502-ECFE-D5C4-A5B76AA71EAC}"/>
+                  </a:ext>
+                </a:extLst>
+              </p:cNvPr>
+              <p:cNvSpPr txBox="1">
+                <a:spLocks/>
+              </p:cNvSpPr>
+              <p:nvPr/>
+            </p:nvSpPr>
+            <p:spPr>
+              <a:xfrm>
+                <a:off x="8025453" y="-440255"/>
+                <a:ext cx="1402326" cy="440255"/>
+              </a:xfrm>
+              <a:prstGeom prst="rect">
+                <a:avLst/>
+              </a:prstGeom>
+            </p:spPr>
+            <p:txBody>
+              <a:bodyPr vert="horz" lIns="91440" tIns="45720" rIns="91440" bIns="45720" rtlCol="0" anchor="ctr">
+                <a:normAutofit fontScale="52500" lnSpcReduction="20000"/>
+              </a:bodyPr>
+              <a:lstStyle>
+                <a:lvl1pPr algn="l" defTabSz="914400" rtl="0" eaLnBrk="1" latinLnBrk="0" hangingPunct="1">
+                  <a:lnSpc>
+                    <a:spcPct val="90000"/>
+                  </a:lnSpc>
+                  <a:spcBef>
+                    <a:spcPct val="0"/>
+                  </a:spcBef>
+                  <a:buNone/>
+                  <a:defRPr sz="4400" kern="1200">
+                    <a:solidFill>
+                      <a:schemeClr val="tx1"/>
+                    </a:solidFill>
+                    <a:latin typeface="+mj-lt"/>
+                    <a:ea typeface="+mj-ea"/>
+                    <a:cs typeface="+mj-cs"/>
+                  </a:defRPr>
+                </a:lvl1pPr>
+              </a:lstStyle>
+              <a:p>
+                <a14:m>
+                  <m:oMathPara xmlns:m="http://schemas.openxmlformats.org/officeDocument/2006/math">
+                    <m:oMathParaPr>
+                      <m:jc m:val="centerGroup"/>
+                    </m:oMathParaPr>
+                    <m:oMath xmlns:m="http://schemas.openxmlformats.org/officeDocument/2006/math">
+                      <m:sSub>
+                        <m:sSubPr>
+                          <m:ctrlPr>
+                            <a:rPr lang="en-US" altLang="zh-TW" b="0" i="1" smtClean="0">
+                              <a:solidFill>
+                                <a:srgbClr val="7030A0"/>
+                              </a:solidFill>
+                              <a:latin typeface="Cambria Math" panose="02040503050406030204" pitchFamily="18" charset="0"/>
+                            </a:rPr>
+                          </m:ctrlPr>
+                        </m:sSubPr>
+                        <m:e>
+                          <m:r>
+                            <a:rPr lang="en-US" altLang="zh-TW" b="0" i="1" smtClean="0">
+                              <a:solidFill>
+                                <a:srgbClr val="7030A0"/>
+                              </a:solidFill>
+                              <a:latin typeface="Cambria Math" panose="02040503050406030204" pitchFamily="18" charset="0"/>
+                            </a:rPr>
+                            <m:t>|</m:t>
+                          </m:r>
+                          <m:r>
+                            <a:rPr lang="en-US" altLang="zh-TW" b="0" i="1" smtClean="0">
+                              <a:solidFill>
+                                <a:srgbClr val="7030A0"/>
+                              </a:solidFill>
+                              <a:latin typeface="Cambria Math" panose="02040503050406030204" pitchFamily="18" charset="0"/>
+                            </a:rPr>
+                            <m:t>𝜓</m:t>
+                          </m:r>
+                        </m:e>
+                        <m:sub>
+                          <m:r>
+                            <a:rPr lang="en-US" altLang="zh-TW" b="0" i="1" smtClean="0">
+                              <a:solidFill>
+                                <a:srgbClr val="7030A0"/>
+                              </a:solidFill>
+                              <a:latin typeface="Cambria Math" panose="02040503050406030204" pitchFamily="18" charset="0"/>
+                            </a:rPr>
+                            <m:t>3</m:t>
+                          </m:r>
+                        </m:sub>
+                      </m:sSub>
+                      <m:d>
+                        <m:dPr>
+                          <m:ctrlPr>
+                            <a:rPr lang="en-US" altLang="zh-TW" b="0" i="1" smtClean="0">
+                              <a:solidFill>
+                                <a:srgbClr val="7030A0"/>
+                              </a:solidFill>
+                              <a:latin typeface="Cambria Math" panose="02040503050406030204" pitchFamily="18" charset="0"/>
+                            </a:rPr>
+                          </m:ctrlPr>
+                        </m:dPr>
+                        <m:e>
+                          <m:r>
+                            <a:rPr lang="en-US" altLang="zh-TW" b="0" i="1" smtClean="0">
+                              <a:solidFill>
+                                <a:srgbClr val="7030A0"/>
+                              </a:solidFill>
+                              <a:latin typeface="Cambria Math" panose="02040503050406030204" pitchFamily="18" charset="0"/>
+                            </a:rPr>
+                            <m:t>𝑥</m:t>
+                          </m:r>
+                        </m:e>
+                      </m:d>
+                      <m:r>
+                        <a:rPr lang="en-US" altLang="zh-TW" b="0" i="1" smtClean="0">
+                          <a:solidFill>
+                            <a:srgbClr val="7030A0"/>
+                          </a:solidFill>
+                          <a:latin typeface="Cambria Math" panose="02040503050406030204" pitchFamily="18" charset="0"/>
+                        </a:rPr>
+                        <m:t>| </m:t>
+                      </m:r>
+                      <m:sSup>
+                        <m:sSupPr>
+                          <m:ctrlPr>
+                            <a:rPr lang="en-US" altLang="zh-TW" b="0" i="1" smtClean="0">
+                              <a:solidFill>
+                                <a:srgbClr val="7030A0"/>
+                              </a:solidFill>
+                              <a:latin typeface="Cambria Math" panose="02040503050406030204" pitchFamily="18" charset="0"/>
+                            </a:rPr>
+                          </m:ctrlPr>
+                        </m:sSupPr>
+                        <m:e>
+                          <m:r>
+                            <a:rPr lang="en-US" altLang="zh-TW" b="0" i="1" smtClean="0">
+                              <a:solidFill>
+                                <a:srgbClr val="7030A0"/>
+                              </a:solidFill>
+                              <a:latin typeface="Cambria Math" panose="02040503050406030204" pitchFamily="18" charset="0"/>
+                            </a:rPr>
+                            <m:t>_</m:t>
+                          </m:r>
+                        </m:e>
+                        <m:sup>
+                          <m:r>
+                            <a:rPr lang="en-US" altLang="zh-TW" b="0" i="1" smtClean="0">
+                              <a:solidFill>
+                                <a:srgbClr val="7030A0"/>
+                              </a:solidFill>
+                              <a:latin typeface="Cambria Math" panose="02040503050406030204" pitchFamily="18" charset="0"/>
+                            </a:rPr>
+                            <m:t>2</m:t>
+                          </m:r>
+                        </m:sup>
+                      </m:sSup>
+                    </m:oMath>
+                  </m:oMathPara>
+                </a14:m>
+                <a:endParaRPr lang="zh-TW" altLang="en-US">
+                  <a:solidFill>
+                    <a:srgbClr val="7030A0"/>
+                  </a:solidFill>
+                </a:endParaRPr>
+              </a:p>
+            </p:txBody>
+          </p:sp>
+        </mc:Choice>
+        <mc:Fallback>
+          <p:sp>
+            <p:nvSpPr>
+              <p:cNvPr id="36" name="標題 1">
+                <a:extLst>
+                  <a:ext uri="{FF2B5EF4-FFF2-40B4-BE49-F238E27FC236}">
+                    <a16:creationId xmlns:a16="http://schemas.microsoft.com/office/drawing/2014/main" id="{ECC31FCD-0502-ECFE-D5C4-A5B76AA71EAC}"/>
+                  </a:ext>
+                </a:extLst>
+              </p:cNvPr>
+              <p:cNvSpPr txBox="1">
+                <a:spLocks noRot="1" noChangeAspect="1" noMove="1" noResize="1" noEditPoints="1" noAdjustHandles="1" noChangeArrowheads="1" noChangeShapeType="1" noTextEdit="1"/>
+              </p:cNvSpPr>
+              <p:nvPr/>
+            </p:nvSpPr>
+            <p:spPr>
+              <a:xfrm>
+                <a:off x="8025453" y="-440255"/>
+                <a:ext cx="1402326" cy="440255"/>
+              </a:xfrm>
+              <a:prstGeom prst="rect">
+                <a:avLst/>
+              </a:prstGeom>
+              <a:blipFill>
+                <a:blip r:embed="rId19"/>
+                <a:stretch>
+                  <a:fillRect l="-3478" b="-15278"/>
+                </a:stretch>
+              </a:blipFill>
+            </p:spPr>
+            <p:txBody>
+              <a:bodyPr/>
+              <a:lstStyle/>
+              <a:p>
+                <a:r>
+                  <a:rPr lang="zh-TW" altLang="en-US">
+                    <a:noFill/>
+                  </a:rPr>
+                  <a:t> </a:t>
+                </a:r>
+              </a:p>
+            </p:txBody>
+          </p:sp>
+        </mc:Fallback>
+      </mc:AlternateContent>
+      <p:pic>
+        <p:nvPicPr>
+          <p:cNvPr id="38" name="圖片 37">
+            <a:extLst>
+              <a:ext uri="{FF2B5EF4-FFF2-40B4-BE49-F238E27FC236}">
+                <a16:creationId xmlns:a16="http://schemas.microsoft.com/office/drawing/2014/main" id="{2BA070C4-5D8A-0BF9-3BD6-D7BD1B679D38}"/>
+              </a:ext>
+            </a:extLst>
+          </p:cNvPr>
+          <p:cNvPicPr>
+            <a:picLocks noChangeAspect="1"/>
+          </p:cNvPicPr>
+          <p:nvPr/>
+        </p:nvPicPr>
+        <p:blipFill>
+          <a:blip r:embed="rId20"/>
+          <a:stretch>
+            <a:fillRect/>
+          </a:stretch>
+        </p:blipFill>
+        <p:spPr>
+          <a:xfrm>
+            <a:off x="3840594" y="1324366"/>
+            <a:ext cx="1047750" cy="323850"/>
+          </a:xfrm>
+          <a:prstGeom prst="rect">
+            <a:avLst/>
+          </a:prstGeom>
+        </p:spPr>
+      </p:pic>
+      <mc:AlternateContent xmlns:mc="http://schemas.openxmlformats.org/markup-compatibility/2006">
+        <mc:Choice xmlns:a14="http://schemas.microsoft.com/office/drawing/2010/main" Requires="a14">
+          <p:sp>
+            <p:nvSpPr>
+              <p:cNvPr id="39" name="標題 1">
+                <a:extLst>
+                  <a:ext uri="{FF2B5EF4-FFF2-40B4-BE49-F238E27FC236}">
+                    <a16:creationId xmlns:a16="http://schemas.microsoft.com/office/drawing/2014/main" id="{320BC41E-20AE-BEBE-623D-2B4184586D78}"/>
+                  </a:ext>
+                </a:extLst>
+              </p:cNvPr>
+              <p:cNvSpPr txBox="1">
+                <a:spLocks/>
+              </p:cNvSpPr>
+              <p:nvPr/>
+            </p:nvSpPr>
+            <p:spPr>
+              <a:xfrm>
+                <a:off x="4695721" y="1024819"/>
+                <a:ext cx="2338880" cy="638054"/>
+              </a:xfrm>
+              <a:prstGeom prst="rect">
+                <a:avLst/>
+              </a:prstGeom>
+            </p:spPr>
+            <p:txBody>
+              <a:bodyPr vert="horz" lIns="91440" tIns="45720" rIns="91440" bIns="45720" rtlCol="0" anchor="ctr">
+                <a:normAutofit fontScale="82500" lnSpcReduction="10000"/>
+              </a:bodyPr>
+              <a:lstStyle>
+                <a:lvl1pPr algn="l" defTabSz="914400" rtl="0" eaLnBrk="1" latinLnBrk="0" hangingPunct="1">
+                  <a:lnSpc>
+                    <a:spcPct val="90000"/>
+                  </a:lnSpc>
+                  <a:spcBef>
+                    <a:spcPct val="0"/>
+                  </a:spcBef>
+                  <a:buNone/>
+                  <a:defRPr sz="4400" kern="1200">
+                    <a:solidFill>
+                      <a:schemeClr val="tx1"/>
+                    </a:solidFill>
+                    <a:latin typeface="+mj-lt"/>
+                    <a:ea typeface="+mj-ea"/>
+                    <a:cs typeface="+mj-cs"/>
+                  </a:defRPr>
+                </a:lvl1pPr>
+              </a:lstStyle>
+              <a:p>
+                <a14:m>
+                  <m:oMathPara xmlns:m="http://schemas.openxmlformats.org/officeDocument/2006/math">
+                    <m:oMathParaPr>
+                      <m:jc m:val="centerGroup"/>
+                    </m:oMathParaPr>
+                    <m:oMath xmlns:m="http://schemas.openxmlformats.org/officeDocument/2006/math">
+                      <m:r>
+                        <m:rPr>
+                          <m:sty m:val="p"/>
+                        </m:rPr>
+                        <a:rPr lang="en-US" altLang="zh-TW" i="1" smtClean="0">
+                          <a:latin typeface="Cambria Math" panose="02040503050406030204" pitchFamily="18" charset="0"/>
+                        </a:rPr>
+                        <m:t>U</m:t>
+                      </m:r>
+                      <m:d>
+                        <m:dPr>
+                          <m:ctrlPr>
+                            <a:rPr lang="en-US" altLang="zh-TW" i="1" smtClean="0">
+                              <a:latin typeface="Cambria Math" panose="02040503050406030204" pitchFamily="18" charset="0"/>
+                            </a:rPr>
+                          </m:ctrlPr>
+                        </m:dPr>
+                        <m:e>
+                          <m:r>
+                            <a:rPr lang="en-US" altLang="zh-TW" i="1" smtClean="0">
+                              <a:latin typeface="Cambria Math" panose="02040503050406030204" pitchFamily="18" charset="0"/>
+                            </a:rPr>
+                            <m:t>𝑥</m:t>
+                          </m:r>
+                        </m:e>
+                      </m:d>
+                      <m:r>
+                        <a:rPr lang="en-US" altLang="zh-TW" i="1" smtClean="0">
+                          <a:latin typeface="Cambria Math" panose="02040503050406030204" pitchFamily="18" charset="0"/>
+                        </a:rPr>
+                        <m:t>=</m:t>
+                      </m:r>
+                      <m:r>
+                        <a:rPr lang="en-US" altLang="zh-TW" b="0" i="1" smtClean="0">
+                          <a:latin typeface="Cambria Math" panose="02040503050406030204" pitchFamily="18" charset="0"/>
+                        </a:rPr>
+                        <m:t>0</m:t>
+                      </m:r>
+                    </m:oMath>
+                  </m:oMathPara>
+                </a14:m>
+                <a:endParaRPr lang="zh-TW" altLang="en-US"/>
+              </a:p>
+            </p:txBody>
+          </p:sp>
+        </mc:Choice>
+        <mc:Fallback>
+          <p:sp>
+            <p:nvSpPr>
+              <p:cNvPr id="39" name="標題 1">
+                <a:extLst>
+                  <a:ext uri="{FF2B5EF4-FFF2-40B4-BE49-F238E27FC236}">
+                    <a16:creationId xmlns:a16="http://schemas.microsoft.com/office/drawing/2014/main" id="{320BC41E-20AE-BEBE-623D-2B4184586D78}"/>
+                  </a:ext>
+                </a:extLst>
+              </p:cNvPr>
+              <p:cNvSpPr txBox="1">
+                <a:spLocks noRot="1" noChangeAspect="1" noMove="1" noResize="1" noEditPoints="1" noAdjustHandles="1" noChangeArrowheads="1" noChangeShapeType="1" noTextEdit="1"/>
+              </p:cNvSpPr>
+              <p:nvPr/>
+            </p:nvSpPr>
+            <p:spPr>
+              <a:xfrm>
+                <a:off x="4695721" y="1024819"/>
+                <a:ext cx="2338880" cy="638054"/>
+              </a:xfrm>
+              <a:prstGeom prst="rect">
+                <a:avLst/>
+              </a:prstGeom>
+              <a:blipFill>
+                <a:blip r:embed="rId21"/>
+                <a:stretch>
+                  <a:fillRect/>
+                </a:stretch>
+              </a:blipFill>
+            </p:spPr>
+            <p:txBody>
+              <a:bodyPr/>
+              <a:lstStyle/>
+              <a:p>
+                <a:r>
+                  <a:rPr lang="zh-TW" altLang="en-US">
+                    <a:noFill/>
+                  </a:rPr>
+                  <a:t> </a:t>
+                </a:r>
+              </a:p>
+            </p:txBody>
+          </p:sp>
+        </mc:Fallback>
+      </mc:AlternateContent>
+    </p:spTree>
+    <p:extLst>
+      <p:ext uri="{BB962C8B-B14F-4D97-AF65-F5344CB8AC3E}">
+        <p14:creationId xmlns:p14="http://schemas.microsoft.com/office/powerpoint/2010/main" val="4179451303"/>
+      </p:ext>
+    </p:extLst>
+  </p:cSld>
+  <p:clrMapOvr>
+    <a:masterClrMapping/>
+  </p:clrMapOvr>
+  <mc:AlternateContent xmlns:mc="http://schemas.openxmlformats.org/markup-compatibility/2006">
+    <mc:Choice xmlns:p14="http://schemas.microsoft.com/office/powerpoint/2010/main" Requires="p14">
+      <p:transition spd="slow" p14:dur="2000">
+        <p:cut/>
+      </p:transition>
+    </mc:Choice>
+    <mc:Fallback>
+      <p:transition spd="slow">
+        <p:cut/>
+      </p:transition>
+    </mc:Fallback>
+  </mc:AlternateContent>
+</p:sld>
+</file>
+
+<file path=ppt/slides/slide5.xml><?xml version="1.0" encoding="utf-8"?>
+<p:sld xmlns:a="http://schemas.openxmlformats.org/drawingml/2006/main" xmlns:r="http://schemas.openxmlformats.org/officeDocument/2006/relationships" xmlns:p="http://schemas.openxmlformats.org/presentationml/2006/main">
+  <p:cSld>
+    <p:spTree>
+      <p:nvGrpSpPr>
+        <p:cNvPr id="1" name=""/>
+        <p:cNvGrpSpPr/>
+        <p:nvPr/>
+      </p:nvGrpSpPr>
+      <p:grpSpPr>
+        <a:xfrm>
+          <a:off x="0" y="0"/>
+          <a:ext cx="0" cy="0"/>
+          <a:chOff x="0" y="0"/>
+          <a:chExt cx="0" cy="0"/>
+        </a:xfrm>
+      </p:grpSpPr>
+      <p:sp>
+        <p:nvSpPr>
+          <p:cNvPr id="2" name="標題 1">
+            <a:extLst>
+              <a:ext uri="{FF2B5EF4-FFF2-40B4-BE49-F238E27FC236}">
+                <a16:creationId xmlns:a16="http://schemas.microsoft.com/office/drawing/2014/main" id="{EE591D2F-647C-1E2F-BDF6-AF506166ACA5}"/>
+              </a:ext>
+            </a:extLst>
+          </p:cNvPr>
+          <p:cNvSpPr>
+            <a:spLocks noGrp="1"/>
+          </p:cNvSpPr>
+          <p:nvPr>
+            <p:ph type="title"/>
+          </p:nvPr>
+        </p:nvSpPr>
+        <p:spPr/>
+        <p:txBody>
+          <a:bodyPr/>
+          <a:lstStyle/>
+          <a:p>
+            <a:endParaRPr lang="zh-TW" altLang="en-US"/>
+          </a:p>
+        </p:txBody>
+      </p:sp>
+      <p:sp>
+        <p:nvSpPr>
+          <p:cNvPr id="3" name="內容版面配置區 2">
+            <a:extLst>
+              <a:ext uri="{FF2B5EF4-FFF2-40B4-BE49-F238E27FC236}">
+                <a16:creationId xmlns:a16="http://schemas.microsoft.com/office/drawing/2014/main" id="{388B567E-FF60-F260-DE9B-8185ED579F8C}"/>
+              </a:ext>
+            </a:extLst>
+          </p:cNvPr>
+          <p:cNvSpPr>
+            <a:spLocks noGrp="1"/>
+          </p:cNvSpPr>
+          <p:nvPr>
+            <p:ph idx="1"/>
+          </p:nvPr>
+        </p:nvSpPr>
+        <p:spPr/>
+        <p:txBody>
+          <a:bodyPr/>
+          <a:lstStyle/>
+          <a:p>
+            <a:endParaRPr lang="zh-TW" altLang="en-US"/>
+          </a:p>
+        </p:txBody>
+      </p:sp>
+    </p:spTree>
+    <p:extLst>
+      <p:ext uri="{BB962C8B-B14F-4D97-AF65-F5344CB8AC3E}">
+        <p14:creationId xmlns:p14="http://schemas.microsoft.com/office/powerpoint/2010/main" val="3343541941"/>
+      </p:ext>
+    </p:extLst>
+  </p:cSld>
+  <p:clrMapOvr>
+    <a:masterClrMapping/>
+  </p:clrMapOvr>
+  <mc:AlternateContent xmlns:mc="http://schemas.openxmlformats.org/markup-compatibility/2006">
+    <mc:Choice xmlns:p14="http://schemas.microsoft.com/office/powerpoint/2010/main" Requires="p14">
+      <p:transition spd="slow" p14:dur="2000">
+        <p:cut/>
+      </p:transition>
+    </mc:Choice>
+    <mc:Fallback>
       <p:transition spd="slow">
         <p:cut/>
       </p:transition>
